--- a/presentation/mapwise_deck.pptx
+++ b/presentation/mapwise_deck.pptx
@@ -2133,16 +2133,22 @@
         </p:nvSpPr>
         <p:spPr>
           <a:xfrm>
-            <a:off x="8110728" y="4933188"/>
-            <a:ext cx="100584" cy="100584"/>
-          </a:xfrm>
-          <a:prstGeom prst="ellipse">
-            <a:avLst/>
-          </a:prstGeom>
-          <a:solidFill>
-            <a:srgbClr val="F2D04B"/>
-          </a:solidFill>
-          <a:ln/>
+            <a:off x="7589520" y="4983480"/>
+            <a:ext cx="1143000" cy="1143000"/>
+          </a:xfrm>
+          <a:prstGeom prst="arc">
+            <a:avLst>
+              <a:gd name="adj1" fmla="val 16200000"/>
+              <a:gd name="adj2" fmla="val 12707280"/>
+            </a:avLst>
+          </a:prstGeom>
+          <a:noFill/>
+          <a:ln w="50800">
+            <a:solidFill>
+              <a:srgbClr val="F2D04B"/>
+            </a:solidFill>
+            <a:prstDash val="solid"/>
+          </a:ln>
         </p:spPr>
       </p:sp>
       <p:sp>
@@ -2178,7 +2184,7 @@
                 <a:ea typeface="Cormorant Garamond" pitchFamily="34" charset="-122"/>
                 <a:cs typeface="Cormorant Garamond" pitchFamily="34" charset="-120"/>
               </a:rPr>
-              <a:t>54%</a:t>
+              <a:t>84%</a:t>
             </a:r>
             <a:endParaRPr lang="en-US" sz="3000" dirty="0"/>
           </a:p>
@@ -2217,7 +2223,7 @@
                 <a:ea typeface="Segoe UI" pitchFamily="34" charset="-122"/>
                 <a:cs typeface="Segoe UI" pitchFamily="34" charset="-120"/>
               </a:rPr>
-              <a:t>MEAN IoU</a:t>
+              <a:t>PIXELS CORRECT</a:t>
             </a:r>
             <a:endParaRPr lang="en-US" sz="950" dirty="0"/>
           </a:p>
@@ -2256,16 +2262,22 @@
         </p:nvSpPr>
         <p:spPr>
           <a:xfrm>
-            <a:off x="10030968" y="4933188"/>
-            <a:ext cx="100584" cy="100584"/>
-          </a:xfrm>
-          <a:prstGeom prst="ellipse">
-            <a:avLst/>
-          </a:prstGeom>
-          <a:solidFill>
-            <a:srgbClr val="F2D04B"/>
-          </a:solidFill>
-          <a:ln/>
+            <a:off x="9509760" y="4983480"/>
+            <a:ext cx="1143000" cy="1143000"/>
+          </a:xfrm>
+          <a:prstGeom prst="arc">
+            <a:avLst>
+              <a:gd name="adj1" fmla="val 16200000"/>
+              <a:gd name="adj2" fmla="val 6328800"/>
+            </a:avLst>
+          </a:prstGeom>
+          <a:noFill/>
+          <a:ln w="50800">
+            <a:solidFill>
+              <a:srgbClr val="F2D04B"/>
+            </a:solidFill>
+            <a:prstDash val="solid"/>
+          </a:ln>
         </p:spPr>
       </p:sp>
       <p:sp>
@@ -2301,7 +2313,7 @@
                 <a:ea typeface="Cormorant Garamond" pitchFamily="34" charset="-122"/>
                 <a:cs typeface="Cormorant Garamond" pitchFamily="34" charset="-120"/>
               </a:rPr>
-              <a:t>84%</a:t>
+              <a:t>54%</a:t>
             </a:r>
             <a:endParaRPr lang="en-US" sz="3000" dirty="0"/>
           </a:p>
@@ -2340,7 +2352,7 @@
                 <a:ea typeface="Segoe UI" pitchFamily="34" charset="-122"/>
                 <a:cs typeface="Segoe UI" pitchFamily="34" charset="-120"/>
               </a:rPr>
-              <a:t>PIXEL ACCURACY</a:t>
+              <a:t>MEAN IoU</a:t>
             </a:r>
             <a:endParaRPr lang="en-US" sz="950" dirty="0"/>
           </a:p>
@@ -2565,8 +2577,8 @@
         </p:nvSpPr>
         <p:spPr>
           <a:xfrm>
-            <a:off x="1051560" y="2971800"/>
-            <a:ext cx="8686800" cy="1280160"/>
+            <a:off x="1051560" y="2944368"/>
+            <a:ext cx="9601200" cy="310896"/>
           </a:xfrm>
           <a:prstGeom prst="rect">
             <a:avLst/>
@@ -2607,7 +2619,7 @@
         </p:nvSpPr>
         <p:spPr>
           <a:xfrm>
-            <a:off x="1051560" y="3703320"/>
+            <a:off x="1051560" y="3858768"/>
             <a:ext cx="2234108" cy="41148"/>
           </a:xfrm>
           <a:prstGeom prst="rect">
@@ -2627,7 +2639,7 @@
         </p:nvSpPr>
         <p:spPr>
           <a:xfrm>
-            <a:off x="1051560" y="3904488"/>
+            <a:off x="1051560" y="4059936"/>
             <a:ext cx="2234108" cy="365760"/>
           </a:xfrm>
           <a:prstGeom prst="rect">
@@ -2666,7 +2678,7 @@
         </p:nvSpPr>
         <p:spPr>
           <a:xfrm>
-            <a:off x="1051560" y="4416552"/>
+            <a:off x="1051560" y="4572000"/>
             <a:ext cx="2234108" cy="274320"/>
           </a:xfrm>
           <a:prstGeom prst="rect">
@@ -2705,7 +2717,7 @@
         </p:nvSpPr>
         <p:spPr>
           <a:xfrm>
-            <a:off x="1051560" y="4745736"/>
+            <a:off x="1051560" y="4901184"/>
             <a:ext cx="2234108" cy="1371600"/>
           </a:xfrm>
           <a:prstGeom prst="rect">
@@ -2747,7 +2759,7 @@
         </p:nvSpPr>
         <p:spPr>
           <a:xfrm>
-            <a:off x="3669716" y="3703320"/>
+            <a:off x="3669716" y="3858768"/>
             <a:ext cx="2234108" cy="41148"/>
           </a:xfrm>
           <a:prstGeom prst="rect">
@@ -2767,7 +2779,7 @@
         </p:nvSpPr>
         <p:spPr>
           <a:xfrm>
-            <a:off x="3669716" y="3904488"/>
+            <a:off x="3669716" y="4059936"/>
             <a:ext cx="2234108" cy="365760"/>
           </a:xfrm>
           <a:prstGeom prst="rect">
@@ -2806,7 +2818,7 @@
         </p:nvSpPr>
         <p:spPr>
           <a:xfrm>
-            <a:off x="3669716" y="4416552"/>
+            <a:off x="3669716" y="4572000"/>
             <a:ext cx="2234108" cy="274320"/>
           </a:xfrm>
           <a:prstGeom prst="rect">
@@ -2845,7 +2857,7 @@
         </p:nvSpPr>
         <p:spPr>
           <a:xfrm>
-            <a:off x="3669716" y="4745736"/>
+            <a:off x="3669716" y="4901184"/>
             <a:ext cx="2234108" cy="1371600"/>
           </a:xfrm>
           <a:prstGeom prst="rect">
@@ -2887,7 +2899,7 @@
         </p:nvSpPr>
         <p:spPr>
           <a:xfrm>
-            <a:off x="6287872" y="3703320"/>
+            <a:off x="6287872" y="3858768"/>
             <a:ext cx="2234108" cy="41148"/>
           </a:xfrm>
           <a:prstGeom prst="rect">
@@ -2907,7 +2919,7 @@
         </p:nvSpPr>
         <p:spPr>
           <a:xfrm>
-            <a:off x="6287872" y="3904488"/>
+            <a:off x="6287872" y="4059936"/>
             <a:ext cx="2234108" cy="365760"/>
           </a:xfrm>
           <a:prstGeom prst="rect">
@@ -2946,7 +2958,7 @@
         </p:nvSpPr>
         <p:spPr>
           <a:xfrm>
-            <a:off x="6287872" y="4416552"/>
+            <a:off x="6287872" y="4572000"/>
             <a:ext cx="2234108" cy="274320"/>
           </a:xfrm>
           <a:prstGeom prst="rect">
@@ -2985,7 +2997,7 @@
         </p:nvSpPr>
         <p:spPr>
           <a:xfrm>
-            <a:off x="6287872" y="4745736"/>
+            <a:off x="6287872" y="4901184"/>
             <a:ext cx="2234108" cy="1371600"/>
           </a:xfrm>
           <a:prstGeom prst="rect">
@@ -3027,7 +3039,7 @@
         </p:nvSpPr>
         <p:spPr>
           <a:xfrm>
-            <a:off x="8906027" y="3703320"/>
+            <a:off x="8906027" y="3858768"/>
             <a:ext cx="2234108" cy="41148"/>
           </a:xfrm>
           <a:prstGeom prst="rect">
@@ -3047,7 +3059,7 @@
         </p:nvSpPr>
         <p:spPr>
           <a:xfrm>
-            <a:off x="8906027" y="3904488"/>
+            <a:off x="8906027" y="4059936"/>
             <a:ext cx="2234108" cy="365760"/>
           </a:xfrm>
           <a:prstGeom prst="rect">
@@ -3086,7 +3098,7 @@
         </p:nvSpPr>
         <p:spPr>
           <a:xfrm>
-            <a:off x="8906027" y="4416552"/>
+            <a:off x="8906027" y="4572000"/>
             <a:ext cx="2234108" cy="274320"/>
           </a:xfrm>
           <a:prstGeom prst="rect">
@@ -3125,7 +3137,7 @@
         </p:nvSpPr>
         <p:spPr>
           <a:xfrm>
-            <a:off x="8906027" y="4745736"/>
+            <a:off x="8906027" y="4901184"/>
             <a:ext cx="2234108" cy="1371600"/>
           </a:xfrm>
           <a:prstGeom prst="rect">
@@ -3167,7 +3179,7 @@
         </p:nvSpPr>
         <p:spPr>
           <a:xfrm>
-            <a:off x="1051560" y="6035040"/>
+            <a:off x="1051560" y="6236208"/>
             <a:ext cx="8229600" cy="274320"/>
           </a:xfrm>
           <a:prstGeom prst="rect">
@@ -3757,16 +3769,22 @@
         </p:nvSpPr>
         <p:spPr>
           <a:xfrm>
-            <a:off x="1732788" y="3104388"/>
-            <a:ext cx="100584" cy="100584"/>
-          </a:xfrm>
-          <a:prstGeom prst="ellipse">
-            <a:avLst/>
-          </a:prstGeom>
-          <a:solidFill>
-            <a:srgbClr val="F2D04B"/>
-          </a:solidFill>
-          <a:ln/>
+            <a:off x="1188720" y="3154680"/>
+            <a:ext cx="1188720" cy="1188720"/>
+          </a:xfrm>
+          <a:prstGeom prst="arc">
+            <a:avLst>
+              <a:gd name="adj1" fmla="val 16200000"/>
+              <a:gd name="adj2" fmla="val 12711600"/>
+            </a:avLst>
+          </a:prstGeom>
+          <a:noFill/>
+          <a:ln w="50800">
+            <a:solidFill>
+              <a:srgbClr val="F2D04B"/>
+            </a:solidFill>
+            <a:prstDash val="solid"/>
+          </a:ln>
         </p:spPr>
       </p:sp>
       <p:sp>
@@ -3880,16 +3898,22 @@
         </p:nvSpPr>
         <p:spPr>
           <a:xfrm>
-            <a:off x="3515868" y="3104388"/>
-            <a:ext cx="100584" cy="100584"/>
-          </a:xfrm>
-          <a:prstGeom prst="ellipse">
-            <a:avLst/>
-          </a:prstGeom>
-          <a:solidFill>
-            <a:srgbClr val="F2D04B"/>
-          </a:solidFill>
-          <a:ln/>
+            <a:off x="2971800" y="3154680"/>
+            <a:ext cx="1188720" cy="1188720"/>
+          </a:xfrm>
+          <a:prstGeom prst="arc">
+            <a:avLst>
+              <a:gd name="adj1" fmla="val 16200000"/>
+              <a:gd name="adj2" fmla="val 11880000"/>
+            </a:avLst>
+          </a:prstGeom>
+          <a:noFill/>
+          <a:ln w="50800">
+            <a:solidFill>
+              <a:srgbClr val="F2D04B"/>
+            </a:solidFill>
+            <a:prstDash val="solid"/>
+          </a:ln>
         </p:spPr>
       </p:sp>
       <p:sp>
@@ -4003,16 +4027,22 @@
         </p:nvSpPr>
         <p:spPr>
           <a:xfrm>
-            <a:off x="5298948" y="3104388"/>
-            <a:ext cx="100584" cy="100584"/>
-          </a:xfrm>
-          <a:prstGeom prst="ellipse">
-            <a:avLst/>
-          </a:prstGeom>
-          <a:solidFill>
-            <a:srgbClr val="F2D04B"/>
-          </a:solidFill>
-          <a:ln/>
+            <a:off x="4754880" y="3154680"/>
+            <a:ext cx="1188720" cy="1188720"/>
+          </a:xfrm>
+          <a:prstGeom prst="arc">
+            <a:avLst>
+              <a:gd name="adj1" fmla="val 16200000"/>
+              <a:gd name="adj2" fmla="val 10579680"/>
+            </a:avLst>
+          </a:prstGeom>
+          <a:noFill/>
+          <a:ln w="50800">
+            <a:solidFill>
+              <a:srgbClr val="F2D04B"/>
+            </a:solidFill>
+            <a:prstDash val="solid"/>
+          </a:ln>
         </p:spPr>
       </p:sp>
       <p:sp>
@@ -4126,16 +4156,22 @@
         </p:nvSpPr>
         <p:spPr>
           <a:xfrm>
-            <a:off x="7082028" y="3104388"/>
-            <a:ext cx="100584" cy="100584"/>
-          </a:xfrm>
-          <a:prstGeom prst="ellipse">
-            <a:avLst/>
-          </a:prstGeom>
-          <a:solidFill>
-            <a:srgbClr val="F2D04B"/>
-          </a:solidFill>
-          <a:ln/>
+            <a:off x="6537960" y="3154680"/>
+            <a:ext cx="1188720" cy="1188720"/>
+          </a:xfrm>
+          <a:prstGeom prst="arc">
+            <a:avLst>
+              <a:gd name="adj1" fmla="val 16200000"/>
+              <a:gd name="adj2" fmla="val 8156160"/>
+            </a:avLst>
+          </a:prstGeom>
+          <a:noFill/>
+          <a:ln w="50800">
+            <a:solidFill>
+              <a:srgbClr val="F2D04B"/>
+            </a:solidFill>
+            <a:prstDash val="solid"/>
+          </a:ln>
         </p:spPr>
       </p:sp>
       <p:sp>
@@ -4355,7 +4391,7 @@
         <p:spPr>
           <a:xfrm>
             <a:off x="1051560" y="5806440"/>
-            <a:ext cx="10058400" cy="274320"/>
+            <a:ext cx="10241280" cy="274320"/>
           </a:xfrm>
           <a:prstGeom prst="rect">
             <a:avLst/>
@@ -4371,15 +4407,29 @@
               <a:buNone/>
             </a:pPr>
             <a:r>
-              <a:rPr lang="en-US" sz="1050" spc="100" kern="0" dirty="0">
-                <a:solidFill>
-                  <a:srgbClr val="4A4742"/>
+              <a:rPr lang="en-US" sz="1050" spc="50" kern="0" dirty="0">
+                <a:solidFill>
+                  <a:srgbClr val="232323"/>
                 </a:solidFill>
                 <a:latin typeface="Segoe UI" pitchFamily="34" charset="0"/>
                 <a:ea typeface="Segoe UI" pitchFamily="34" charset="-122"/>
                 <a:cs typeface="Segoe UI" pitchFamily="34" charset="-120"/>
               </a:rPr>
-              <a:t>Mean IoU 54%  ·  pixel accuracy 84%  ·  24 epochs in 41 minutes on one T4</a:t>
+              <a:t>84% of all pixels land in the right class</a:t>
+            </a:r>
+            <a:pPr indent="0" marL="0">
+              <a:buNone/>
+            </a:pPr>
+            <a:r>
+              <a:rPr lang="en-US" sz="1050" spc="50" kern="0" dirty="0">
+                <a:solidFill>
+                  <a:srgbClr val="9A948A"/>
+                </a:solidFill>
+                <a:latin typeface="Segoe UI" pitchFamily="34" charset="0"/>
+                <a:ea typeface="Segoe UI" pitchFamily="34" charset="-122"/>
+                <a:cs typeface="Segoe UI" pitchFamily="34" charset="-120"/>
+              </a:rPr>
+              <a:t>   ·   mean IoU 54% across all seven classes, a deliberately strict measure   ·   24 epochs in 41 minutes on one T4</a:t>
             </a:r>
             <a:endParaRPr lang="en-US" sz="1050" dirty="0"/>
           </a:p>

--- a/presentation/mapwise_deck.pptx
+++ b/presentation/mapwise_deck.pptx
@@ -2268,7 +2268,7 @@
           <a:prstGeom prst="arc">
             <a:avLst>
               <a:gd name="adj1" fmla="val 16200000"/>
-              <a:gd name="adj2" fmla="val 6328800"/>
+              <a:gd name="adj2" fmla="val 8283600"/>
             </a:avLst>
           </a:prstGeom>
           <a:noFill/>
@@ -2313,7 +2313,7 @@
                 <a:ea typeface="Cormorant Garamond" pitchFamily="34" charset="-122"/>
                 <a:cs typeface="Cormorant Garamond" pitchFamily="34" charset="-120"/>
               </a:rPr>
-              <a:t>54%</a:t>
+              <a:t>63%</a:t>
             </a:r>
             <a:endParaRPr lang="en-US" sz="3000" dirty="0"/>
           </a:p>
@@ -4261,7 +4261,7 @@
         <p:spPr>
           <a:xfrm>
             <a:off x="8001000" y="3017520"/>
-            <a:ext cx="3154680" cy="2286000"/>
+            <a:ext cx="3154680" cy="2606040"/>
           </a:xfrm>
           <a:prstGeom prst="rect">
             <a:avLst/>
@@ -4280,8 +4280,8 @@
         </p:nvSpPr>
         <p:spPr>
           <a:xfrm>
-            <a:off x="8229600" y="3246120"/>
-            <a:ext cx="2743200" cy="320040"/>
+            <a:off x="8229600" y="3182112"/>
+            <a:ext cx="2743200" cy="310896"/>
           </a:xfrm>
           <a:prstGeom prst="rect">
             <a:avLst/>
@@ -4297,7 +4297,7 @@
               <a:buNone/>
             </a:pPr>
             <a:r>
-              <a:rPr lang="en-US" sz="1700" dirty="0">
+              <a:rPr lang="en-US" sz="1600" dirty="0">
                 <a:solidFill>
                   <a:srgbClr val="232323"/>
                 </a:solidFill>
@@ -4307,7 +4307,7 @@
               </a:rPr>
               <a:t>The rare classes are hard.</a:t>
             </a:r>
-            <a:endParaRPr lang="en-US" sz="1700" dirty="0"/>
+            <a:endParaRPr lang="en-US" sz="1600" dirty="0"/>
           </a:p>
         </p:txBody>
       </p:sp>
@@ -4319,8 +4319,8 @@
         </p:nvSpPr>
         <p:spPr>
           <a:xfrm>
-            <a:off x="8229600" y="3657600"/>
-            <a:ext cx="2743200" cy="1554480"/>
+            <a:off x="8229600" y="3611880"/>
+            <a:ext cx="2743200" cy="1874520"/>
           </a:xfrm>
           <a:prstGeom prst="rect">
             <a:avLst/>
@@ -4334,12 +4334,12 @@
           <a:p>
             <a:pPr indent="0" marL="0">
               <a:lnSpc>
-                <a:spcPct val="140000"/>
+                <a:spcPct val="132000"/>
               </a:lnSpc>
               <a:buNone/>
             </a:pPr>
             <a:r>
-              <a:rPr lang="en-US" sz="1050" dirty="0">
+              <a:rPr lang="en-US" sz="1000" dirty="0">
                 <a:solidFill>
                   <a:srgbClr val="9A948A"/>
                 </a:solidFill>
@@ -4347,28 +4347,28 @@
                 <a:ea typeface="Segoe UI Light" pitchFamily="34" charset="-122"/>
                 <a:cs typeface="Segoe UI Light" pitchFamily="34" charset="-120"/>
               </a:rPr>
-              <a:t>DeepGlobe is heavily imbalanced. Weighted Dice loss lifts rangeland (34%) and barren (45%) into usefulness, but 'unknown' is a few dozen pixels a tile and stays at zero.</a:t>
-            </a:r>
-            <a:endParaRPr lang="en-US" sz="1050" dirty="0"/>
+              <a:t>DeepGlobe is heavily imbalanced. Weighted Dice loss lifts rangeland (34%) and barren (45%) into usefulness.</a:t>
+            </a:r>
+            <a:endParaRPr lang="en-US" sz="1000" dirty="0"/>
           </a:p>
           <a:p>
             <a:pPr indent="0" marL="0">
               <a:lnSpc>
-                <a:spcPct val="140000"/>
+                <a:spcPct val="132000"/>
               </a:lnSpc>
               <a:buNone/>
             </a:pPr>
-            <a:endParaRPr lang="en-US" sz="1050" dirty="0"/>
+            <a:endParaRPr lang="en-US" sz="1000" dirty="0"/>
           </a:p>
           <a:p>
             <a:pPr indent="0" marL="0">
               <a:lnSpc>
-                <a:spcPct val="140000"/>
+                <a:spcPct val="132000"/>
               </a:lnSpc>
               <a:buNone/>
             </a:pPr>
             <a:r>
-              <a:rPr lang="en-US" sz="1050" dirty="0">
+              <a:rPr lang="en-US" sz="1000" dirty="0">
                 <a:solidFill>
                   <a:srgbClr val="9A948A"/>
                 </a:solidFill>
@@ -4376,9 +4376,9 @@
                 <a:ea typeface="Segoe UI Light" pitchFamily="34" charset="-122"/>
                 <a:cs typeface="Segoe UI Light" pitchFamily="34" charset="-120"/>
               </a:rPr>
-              <a:t>So the numbers are published per class, not averaged away.</a:t>
-            </a:r>
-            <a:endParaRPr lang="en-US" sz="1050" dirty="0"/>
+              <a:t>'Unknown' is a void label — one pixel in the sampled set — so it sits outside the mean, as PASCAL VOC and Cityscapes do with theirs.</a:t>
+            </a:r>
+            <a:endParaRPr lang="en-US" sz="1000" dirty="0"/>
           </a:p>
         </p:txBody>
       </p:sp>
@@ -4429,7 +4429,7 @@
                 <a:ea typeface="Segoe UI" pitchFamily="34" charset="-122"/>
                 <a:cs typeface="Segoe UI" pitchFamily="34" charset="-120"/>
               </a:rPr>
-              <a:t>   ·   mean IoU 54% across all seven classes, a deliberately strict measure   ·   24 epochs in 41 minutes on one T4</a:t>
+              <a:t>   ·   mean IoU 63% across the six labelled classes, a deliberately strict measure   ·   24 epochs in 41 minutes on one T4</a:t>
             </a:r>
             <a:endParaRPr lang="en-US" sz="1050" dirty="0"/>
           </a:p>

--- a/presentation/mapwise_deck.pptx
+++ b/presentation/mapwise_deck.pptx
@@ -2139,7 +2139,7 @@
           <a:prstGeom prst="arc">
             <a:avLst>
               <a:gd name="adj1" fmla="val 16200000"/>
-              <a:gd name="adj2" fmla="val 12707280"/>
+              <a:gd name="adj2" fmla="val 13152240"/>
             </a:avLst>
           </a:prstGeom>
           <a:noFill/>
@@ -2184,7 +2184,7 @@
                 <a:ea typeface="Cormorant Garamond" pitchFamily="34" charset="-122"/>
                 <a:cs typeface="Cormorant Garamond" pitchFamily="34" charset="-120"/>
               </a:rPr>
-              <a:t>84%</a:t>
+              <a:t>86%</a:t>
             </a:r>
             <a:endParaRPr lang="en-US" sz="3000" dirty="0"/>
           </a:p>
@@ -2268,7 +2268,7 @@
           <a:prstGeom prst="arc">
             <a:avLst>
               <a:gd name="adj1" fmla="val 16200000"/>
-              <a:gd name="adj2" fmla="val 8283600"/>
+              <a:gd name="adj2" fmla="val 9402480"/>
             </a:avLst>
           </a:prstGeom>
           <a:noFill/>
@@ -2313,7 +2313,7 @@
                 <a:ea typeface="Cormorant Garamond" pitchFamily="34" charset="-122"/>
                 <a:cs typeface="Cormorant Garamond" pitchFamily="34" charset="-120"/>
               </a:rPr>
-              <a:t>63%</a:t>
+              <a:t>69%</a:t>
             </a:r>
             <a:endParaRPr lang="en-US" sz="3000" dirty="0"/>
           </a:p>
@@ -3775,7 +3775,7 @@
           <a:prstGeom prst="arc">
             <a:avLst>
               <a:gd name="adj1" fmla="val 16200000"/>
-              <a:gd name="adj2" fmla="val 12711600"/>
+              <a:gd name="adj2" fmla="val 13344480"/>
             </a:avLst>
           </a:prstGeom>
           <a:noFill/>
@@ -3820,7 +3820,7 @@
                 <a:ea typeface="Cormorant Garamond" pitchFamily="34" charset="-122"/>
                 <a:cs typeface="Cormorant Garamond" pitchFamily="34" charset="-120"/>
               </a:rPr>
-              <a:t>84%</a:t>
+              <a:t>87%</a:t>
             </a:r>
             <a:endParaRPr lang="en-US" sz="3000" dirty="0"/>
           </a:p>
@@ -3904,7 +3904,7 @@
           <a:prstGeom prst="arc">
             <a:avLst>
               <a:gd name="adj1" fmla="val 16200000"/>
-              <a:gd name="adj2" fmla="val 11880000"/>
+              <a:gd name="adj2" fmla="val 11061360"/>
             </a:avLst>
           </a:prstGeom>
           <a:noFill/>
@@ -3949,7 +3949,7 @@
                 <a:ea typeface="Cormorant Garamond" pitchFamily="34" charset="-122"/>
                 <a:cs typeface="Cormorant Garamond" pitchFamily="34" charset="-120"/>
               </a:rPr>
-              <a:t>80%</a:t>
+              <a:t>76%</a:t>
             </a:r>
             <a:endParaRPr lang="en-US" sz="3000" dirty="0"/>
           </a:p>
@@ -4033,7 +4033,7 @@
           <a:prstGeom prst="arc">
             <a:avLst>
               <a:gd name="adj1" fmla="val 16200000"/>
-              <a:gd name="adj2" fmla="val 10579680"/>
+              <a:gd name="adj2" fmla="val 12553920"/>
             </a:avLst>
           </a:prstGeom>
           <a:noFill/>
@@ -4078,7 +4078,7 @@
                 <a:ea typeface="Cormorant Garamond" pitchFamily="34" charset="-122"/>
                 <a:cs typeface="Cormorant Garamond" pitchFamily="34" charset="-120"/>
               </a:rPr>
-              <a:t>74%</a:t>
+              <a:t>83%</a:t>
             </a:r>
             <a:endParaRPr lang="en-US" sz="3000" dirty="0"/>
           </a:p>
@@ -4162,7 +4162,7 @@
           <a:prstGeom prst="arc">
             <a:avLst>
               <a:gd name="adj1" fmla="val 16200000"/>
-              <a:gd name="adj2" fmla="val 8156160"/>
+              <a:gd name="adj2" fmla="val 11597040"/>
             </a:avLst>
           </a:prstGeom>
           <a:noFill/>
@@ -4207,7 +4207,7 @@
                 <a:ea typeface="Cormorant Garamond" pitchFamily="34" charset="-122"/>
                 <a:cs typeface="Cormorant Garamond" pitchFamily="34" charset="-120"/>
               </a:rPr>
-              <a:t>63%</a:t>
+              <a:t>79%</a:t>
             </a:r>
             <a:endParaRPr lang="en-US" sz="3000" dirty="0"/>
           </a:p>
@@ -4347,7 +4347,7 @@
                 <a:ea typeface="Segoe UI Light" pitchFamily="34" charset="-122"/>
                 <a:cs typeface="Segoe UI Light" pitchFamily="34" charset="-120"/>
               </a:rPr>
-              <a:t>DeepGlobe is heavily imbalanced. Weighted Dice loss lifts rangeland (34%) and barren (45%) into usefulness.</a:t>
+              <a:t>DeepGlobe is heavily imbalanced. Weighted Dice loss lifts rangeland (35%) and barren (52%) into usefulness.</a:t>
             </a:r>
             <a:endParaRPr lang="en-US" sz="1000" dirty="0"/>
           </a:p>
@@ -4415,7 +4415,7 @@
                 <a:ea typeface="Segoe UI" pitchFamily="34" charset="-122"/>
                 <a:cs typeface="Segoe UI" pitchFamily="34" charset="-120"/>
               </a:rPr>
-              <a:t>84% of all pixels land in the right class</a:t>
+              <a:t>86% of all pixels land in the right class</a:t>
             </a:r>
             <a:pPr indent="0" marL="0">
               <a:buNone/>
@@ -4429,7 +4429,7 @@
                 <a:ea typeface="Segoe UI" pitchFamily="34" charset="-122"/>
                 <a:cs typeface="Segoe UI" pitchFamily="34" charset="-120"/>
               </a:rPr>
-              <a:t>   ·   mean IoU 63% across the six labelled classes, a deliberately strict measure   ·   24 epochs in 41 minutes on one T4</a:t>
+              <a:t>   ·   mean IoU 69% across the six labelled classes, a deliberately strict measure   ·   60 epochs in 150 minutes on one T4</a:t>
             </a:r>
             <a:endParaRPr lang="en-US" sz="1050" dirty="0"/>
           </a:p>
